--- a/slides/4-10_renal_hepatic_assessment/4-10_renal_hepatic_assessment.pptx
+++ b/slides/4-10_renal_hepatic_assessment/4-10_renal_hepatic_assessment.pptx
@@ -2971,12 +2971,12 @@
         </p:nvSpPr>
         <p:spPr>
           <a:xfrm>
-            <a:off x="502920" y="1691640"/>
-            <a:ext cx="5472684" cy="3161081"/>
+            <a:off x="502920" y="1664208"/>
+            <a:ext cx="5472684" cy="3163824"/>
           </a:xfrm>
           <a:prstGeom prst="roundRect">
             <a:avLst>
-              <a:gd name="adj" fmla="val 2314"/>
+              <a:gd name="adj" fmla="val 2312"/>
             </a:avLst>
           </a:prstGeom>
           <a:solidFill>
@@ -2993,7 +2993,7 @@
         </p:nvSpPr>
         <p:spPr>
           <a:xfrm>
-            <a:off x="594360" y="1783080"/>
+            <a:off x="594360" y="1755648"/>
             <a:ext cx="5289804" cy="420624"/>
           </a:xfrm>
           <a:prstGeom prst="rect">
@@ -3032,7 +3032,7 @@
         </p:nvSpPr>
         <p:spPr>
           <a:xfrm>
-            <a:off x="594360" y="2221992"/>
+            <a:off x="594360" y="2194560"/>
             <a:ext cx="329184" cy="374904"/>
           </a:xfrm>
           <a:prstGeom prst="rect">
@@ -3071,7 +3071,7 @@
         </p:nvSpPr>
         <p:spPr>
           <a:xfrm>
-            <a:off x="841248" y="2221992"/>
+            <a:off x="841248" y="2194560"/>
             <a:ext cx="5042916" cy="374904"/>
           </a:xfrm>
           <a:prstGeom prst="rect">
@@ -3121,7 +3121,7 @@
         </p:nvSpPr>
         <p:spPr>
           <a:xfrm>
-            <a:off x="841248" y="2557577"/>
+            <a:off x="841248" y="2530145"/>
             <a:ext cx="5042916" cy="374904"/>
           </a:xfrm>
           <a:prstGeom prst="rect">
@@ -3160,7 +3160,7 @@
         </p:nvSpPr>
         <p:spPr>
           <a:xfrm>
-            <a:off x="594360" y="2956255"/>
+            <a:off x="594360" y="3153766"/>
             <a:ext cx="329184" cy="374904"/>
           </a:xfrm>
           <a:prstGeom prst="rect">
@@ -3199,7 +3199,7 @@
         </p:nvSpPr>
         <p:spPr>
           <a:xfrm>
-            <a:off x="841248" y="2956255"/>
+            <a:off x="841248" y="3153766"/>
             <a:ext cx="5042916" cy="374904"/>
           </a:xfrm>
           <a:prstGeom prst="rect">
@@ -3238,7 +3238,7 @@
         </p:nvSpPr>
         <p:spPr>
           <a:xfrm>
-            <a:off x="594360" y="3355848"/>
+            <a:off x="594360" y="3777386"/>
             <a:ext cx="329184" cy="374904"/>
           </a:xfrm>
           <a:prstGeom prst="rect">
@@ -3277,7 +3277,7 @@
         </p:nvSpPr>
         <p:spPr>
           <a:xfrm>
-            <a:off x="841248" y="3355848"/>
+            <a:off x="841248" y="3777386"/>
             <a:ext cx="5042916" cy="374904"/>
           </a:xfrm>
           <a:prstGeom prst="rect">
@@ -3316,7 +3316,7 @@
         </p:nvSpPr>
         <p:spPr>
           <a:xfrm>
-            <a:off x="594360" y="3755441"/>
+            <a:off x="594360" y="4401007"/>
             <a:ext cx="329184" cy="374904"/>
           </a:xfrm>
           <a:prstGeom prst="rect">
@@ -3355,7 +3355,7 @@
         </p:nvSpPr>
         <p:spPr>
           <a:xfrm>
-            <a:off x="841248" y="3755441"/>
+            <a:off x="841248" y="4401007"/>
             <a:ext cx="5042916" cy="374904"/>
           </a:xfrm>
           <a:prstGeom prst="rect">
@@ -3394,12 +3394,12 @@
         </p:nvSpPr>
         <p:spPr>
           <a:xfrm>
-            <a:off x="6213348" y="1691640"/>
-            <a:ext cx="5472684" cy="3161081"/>
+            <a:off x="6213348" y="1664208"/>
+            <a:ext cx="5472684" cy="3163824"/>
           </a:xfrm>
           <a:prstGeom prst="roundRect">
             <a:avLst>
-              <a:gd name="adj" fmla="val 2314"/>
+              <a:gd name="adj" fmla="val 2312"/>
             </a:avLst>
           </a:prstGeom>
           <a:solidFill>
@@ -3416,7 +3416,7 @@
         </p:nvSpPr>
         <p:spPr>
           <a:xfrm>
-            <a:off x="6304788" y="1783080"/>
+            <a:off x="6304788" y="1755648"/>
             <a:ext cx="5289804" cy="420624"/>
           </a:xfrm>
           <a:prstGeom prst="rect">
@@ -3455,7 +3455,7 @@
         </p:nvSpPr>
         <p:spPr>
           <a:xfrm>
-            <a:off x="6304788" y="2221992"/>
+            <a:off x="6304788" y="2194560"/>
             <a:ext cx="329184" cy="374904"/>
           </a:xfrm>
           <a:prstGeom prst="rect">
@@ -3494,7 +3494,7 @@
         </p:nvSpPr>
         <p:spPr>
           <a:xfrm>
-            <a:off x="6551676" y="2221992"/>
+            <a:off x="6551676" y="2194560"/>
             <a:ext cx="5042916" cy="374904"/>
           </a:xfrm>
           <a:prstGeom prst="rect">
@@ -3533,7 +3533,7 @@
         </p:nvSpPr>
         <p:spPr>
           <a:xfrm>
-            <a:off x="6551676" y="2557577"/>
+            <a:off x="6551676" y="2530145"/>
             <a:ext cx="5042916" cy="374904"/>
           </a:xfrm>
           <a:prstGeom prst="rect">
@@ -3572,7 +3572,7 @@
         </p:nvSpPr>
         <p:spPr>
           <a:xfrm>
-            <a:off x="6304788" y="2956255"/>
+            <a:off x="6304788" y="2929738"/>
             <a:ext cx="329184" cy="374904"/>
           </a:xfrm>
           <a:prstGeom prst="rect">
@@ -3611,7 +3611,7 @@
         </p:nvSpPr>
         <p:spPr>
           <a:xfrm>
-            <a:off x="6551676" y="2956255"/>
+            <a:off x="6551676" y="2929738"/>
             <a:ext cx="5042916" cy="374904"/>
           </a:xfrm>
           <a:prstGeom prst="rect">
@@ -3650,7 +3650,7 @@
         </p:nvSpPr>
         <p:spPr>
           <a:xfrm>
-            <a:off x="6551676" y="3291840"/>
+            <a:off x="6551676" y="3265322"/>
             <a:ext cx="5042916" cy="374904"/>
           </a:xfrm>
           <a:prstGeom prst="rect">
@@ -3689,7 +3689,7 @@
         </p:nvSpPr>
         <p:spPr>
           <a:xfrm>
-            <a:off x="6304788" y="3691433"/>
+            <a:off x="6304788" y="3665830"/>
             <a:ext cx="329184" cy="374904"/>
           </a:xfrm>
           <a:prstGeom prst="rect">
@@ -3728,7 +3728,7 @@
         </p:nvSpPr>
         <p:spPr>
           <a:xfrm>
-            <a:off x="6551676" y="3691433"/>
+            <a:off x="6551676" y="3665830"/>
             <a:ext cx="5042916" cy="374904"/>
           </a:xfrm>
           <a:prstGeom prst="rect">
@@ -3767,7 +3767,7 @@
         </p:nvSpPr>
         <p:spPr>
           <a:xfrm>
-            <a:off x="6551676" y="4027018"/>
+            <a:off x="6551676" y="4001414"/>
             <a:ext cx="5042916" cy="374904"/>
           </a:xfrm>
           <a:prstGeom prst="rect">
@@ -3806,7 +3806,7 @@
         </p:nvSpPr>
         <p:spPr>
           <a:xfrm>
-            <a:off x="6304788" y="4425696"/>
+            <a:off x="6304788" y="4401007"/>
             <a:ext cx="329184" cy="374904"/>
           </a:xfrm>
           <a:prstGeom prst="rect">
@@ -3845,7 +3845,7 @@
         </p:nvSpPr>
         <p:spPr>
           <a:xfrm>
-            <a:off x="6551676" y="4425696"/>
+            <a:off x="6551676" y="4401007"/>
             <a:ext cx="5042916" cy="374904"/>
           </a:xfrm>
           <a:prstGeom prst="rect">
@@ -3884,12 +3884,12 @@
         </p:nvSpPr>
         <p:spPr>
           <a:xfrm>
-            <a:off x="502920" y="5072177"/>
-            <a:ext cx="11183112" cy="816559"/>
+            <a:off x="502920" y="5047488"/>
+            <a:ext cx="11183112" cy="868680"/>
           </a:xfrm>
           <a:prstGeom prst="roundRect">
             <a:avLst>
-              <a:gd name="adj" fmla="val 8959"/>
+              <a:gd name="adj" fmla="val 8421"/>
             </a:avLst>
           </a:prstGeom>
           <a:solidFill>
@@ -3911,7 +3911,7 @@
         </p:nvSpPr>
         <p:spPr>
           <a:xfrm>
-            <a:off x="685800" y="5145329"/>
+            <a:off x="685800" y="5146243"/>
             <a:ext cx="10817352" cy="374904"/>
           </a:xfrm>
           <a:prstGeom prst="rect">
@@ -3950,7 +3950,7 @@
         </p:nvSpPr>
         <p:spPr>
           <a:xfrm>
-            <a:off x="685800" y="5479999"/>
+            <a:off x="685800" y="5481828"/>
             <a:ext cx="10817352" cy="374904"/>
           </a:xfrm>
           <a:prstGeom prst="rect">
@@ -4376,7 +4376,7 @@
           </p:nvPr>
         </p:nvGraphicFramePr>
         <p:xfrm>
-          <a:off x="502920" y="1691640"/>
+          <a:off x="502920" y="1664208"/>
           <a:ext cx="11155680" cy="914400"/>
         </p:xfrm>
         <a:graphic>
@@ -4388,7 +4388,7 @@
                 <a:gridCol w="3959352"/>
                 <a:gridCol w="4224528"/>
               </a:tblGrid>
-              <a:tr h="338328">
+              <a:tr h="344729">
                 <a:tc>
                   <a:txBody>
                     <a:bodyPr/>
@@ -4418,7 +4418,7 @@
                       </a:endParaRPr>
                     </a:p>
                   </a:txBody>
-                  <a:tcPr marL="76200" marR="76200" marT="12700" marB="12700" anchor="ctr">
+                  <a:tcPr marL="76200" marR="76200" marT="39370" marB="0" anchor="ctr">
                     <a:lnL w="12700" cap="flat" cmpd="sng" algn="ctr">
                       <a:solidFill>
                         <a:srgbClr val="BFBFBF"/>
@@ -4489,7 +4489,7 @@
                       </a:endParaRPr>
                     </a:p>
                   </a:txBody>
-                  <a:tcPr marL="76200" marR="76200" marT="12700" marB="12700" anchor="ctr">
+                  <a:tcPr marL="76200" marR="76200" marT="39370" marB="0" anchor="ctr">
                     <a:lnL w="12700" cap="flat" cmpd="sng" algn="ctr">
                       <a:solidFill>
                         <a:srgbClr val="BFBFBF"/>
@@ -4560,7 +4560,7 @@
                       </a:endParaRPr>
                     </a:p>
                   </a:txBody>
-                  <a:tcPr marL="76200" marR="76200" marT="12700" marB="12700" anchor="ctr">
+                  <a:tcPr marL="76200" marR="76200" marT="39370" marB="0" anchor="ctr">
                     <a:lnL w="12700" cap="flat" cmpd="sng" algn="ctr">
                       <a:solidFill>
                         <a:srgbClr val="BFBFBF"/>
@@ -4603,7 +4603,7 @@
                   </a:tcPr>
                 </a:tc>
               </a:tr>
-              <a:tr h="640080">
+              <a:tr h="649224">
                 <a:tc>
                   <a:txBody>
                     <a:bodyPr/>
@@ -4633,7 +4633,7 @@
                       </a:endParaRPr>
                     </a:p>
                   </a:txBody>
-                  <a:tcPr marL="76200" marR="76200" marT="12700" marB="12700" anchor="ctr">
+                  <a:tcPr marL="76200" marR="76200" marT="39370" marB="0" anchor="ctr">
                     <a:lnL w="12700" cap="flat" cmpd="sng" algn="ctr">
                       <a:solidFill>
                         <a:srgbClr val="BFBFBF"/>
@@ -4725,7 +4725,7 @@
                       </a:endParaRPr>
                     </a:p>
                   </a:txBody>
-                  <a:tcPr marL="76200" marR="76200" marT="12700" marB="12700" anchor="ctr">
+                  <a:tcPr marL="76200" marR="76200" marT="39370" marB="0" anchor="ctr">
                     <a:lnL w="12700" cap="flat" cmpd="sng" algn="ctr">
                       <a:solidFill>
                         <a:srgbClr val="BFBFBF"/>
@@ -4817,7 +4817,7 @@
                       </a:endParaRPr>
                     </a:p>
                   </a:txBody>
-                  <a:tcPr marL="76200" marR="76200" marT="12700" marB="12700" anchor="ctr">
+                  <a:tcPr marL="76200" marR="76200" marT="39370" marB="0" anchor="ctr">
                     <a:lnL w="12700" cap="flat" cmpd="sng" algn="ctr">
                       <a:solidFill>
                         <a:srgbClr val="BFBFBF"/>
@@ -4857,7 +4857,7 @@
                   </a:tcPr>
                 </a:tc>
               </a:tr>
-              <a:tr h="640080">
+              <a:tr h="649224">
                 <a:tc>
                   <a:txBody>
                     <a:bodyPr/>
@@ -4887,7 +4887,7 @@
                       </a:endParaRPr>
                     </a:p>
                   </a:txBody>
-                  <a:tcPr marL="76200" marR="76200" marT="12700" marB="12700" anchor="ctr">
+                  <a:tcPr marL="76200" marR="76200" marT="39370" marB="0" anchor="ctr">
                     <a:lnL w="12700" cap="flat" cmpd="sng" algn="ctr">
                       <a:solidFill>
                         <a:srgbClr val="BFBFBF"/>
@@ -4979,7 +4979,7 @@
                       </a:endParaRPr>
                     </a:p>
                   </a:txBody>
-                  <a:tcPr marL="76200" marR="76200" marT="12700" marB="12700" anchor="ctr">
+                  <a:tcPr marL="76200" marR="76200" marT="39370" marB="0" anchor="ctr">
                     <a:lnL w="12700" cap="flat" cmpd="sng" algn="ctr">
                       <a:solidFill>
                         <a:srgbClr val="BFBFBF"/>
@@ -5071,7 +5071,7 @@
                       </a:endParaRPr>
                     </a:p>
                   </a:txBody>
-                  <a:tcPr marL="76200" marR="76200" marT="12700" marB="12700" anchor="ctr">
+                  <a:tcPr marL="76200" marR="76200" marT="39370" marB="0" anchor="ctr">
                     <a:lnL w="12700" cap="flat" cmpd="sng" algn="ctr">
                       <a:solidFill>
                         <a:srgbClr val="BFBFBF"/>
@@ -5111,7 +5111,7 @@
                   </a:tcPr>
                 </a:tc>
               </a:tr>
-              <a:tr h="640080">
+              <a:tr h="649224">
                 <a:tc>
                   <a:txBody>
                     <a:bodyPr/>
@@ -5141,7 +5141,7 @@
                       </a:endParaRPr>
                     </a:p>
                   </a:txBody>
-                  <a:tcPr marL="76200" marR="76200" marT="12700" marB="12700" anchor="ctr">
+                  <a:tcPr marL="76200" marR="76200" marT="39370" marB="0" anchor="ctr">
                     <a:lnL w="12700" cap="flat" cmpd="sng" algn="ctr">
                       <a:solidFill>
                         <a:srgbClr val="BFBFBF"/>
@@ -5233,7 +5233,7 @@
                       </a:endParaRPr>
                     </a:p>
                   </a:txBody>
-                  <a:tcPr marL="76200" marR="76200" marT="12700" marB="12700" anchor="ctr">
+                  <a:tcPr marL="76200" marR="76200" marT="39370" marB="0" anchor="ctr">
                     <a:lnL w="12700" cap="flat" cmpd="sng" algn="ctr">
                       <a:solidFill>
                         <a:srgbClr val="BFBFBF"/>
@@ -5325,7 +5325,7 @@
                       </a:endParaRPr>
                     </a:p>
                   </a:txBody>
-                  <a:tcPr marL="76200" marR="76200" marT="12700" marB="12700" anchor="ctr">
+                  <a:tcPr marL="76200" marR="76200" marT="39370" marB="0" anchor="ctr">
                     <a:lnL w="12700" cap="flat" cmpd="sng" algn="ctr">
                       <a:solidFill>
                         <a:srgbClr val="BFBFBF"/>
@@ -5365,7 +5365,7 @@
                   </a:tcPr>
                 </a:tc>
               </a:tr>
-              <a:tr h="640080">
+              <a:tr h="649224">
                 <a:tc>
                   <a:txBody>
                     <a:bodyPr/>
@@ -5395,7 +5395,7 @@
                       </a:endParaRPr>
                     </a:p>
                   </a:txBody>
-                  <a:tcPr marL="76200" marR="76200" marT="12700" marB="12700" anchor="ctr">
+                  <a:tcPr marL="76200" marR="76200" marT="39370" marB="0" anchor="ctr">
                     <a:lnL w="12700" cap="flat" cmpd="sng" algn="ctr">
                       <a:solidFill>
                         <a:srgbClr val="BFBFBF"/>
@@ -5487,7 +5487,7 @@
                       </a:endParaRPr>
                     </a:p>
                   </a:txBody>
-                  <a:tcPr marL="76200" marR="76200" marT="12700" marB="12700" anchor="ctr">
+                  <a:tcPr marL="76200" marR="76200" marT="39370" marB="0" anchor="ctr">
                     <a:lnL w="12700" cap="flat" cmpd="sng" algn="ctr">
                       <a:solidFill>
                         <a:srgbClr val="BFBFBF"/>
@@ -5540,7 +5540,7 @@
                       <a:r>
                         <a:rPr lang="ja-JP" altLang="en-US" sz="2200" b="1" dirty="0">
                           <a:solidFill>
-                            <a:srgbClr val="C00000"/>
+                            <a:srgbClr val="D55E00"/>
                           </a:solidFill>
                           <a:latin typeface="メイリオ" pitchFamily="34" charset="0"/>
                           <a:ea typeface="メイリオ" pitchFamily="34" charset="-122"/>
@@ -5555,7 +5555,7 @@
                       </a:endParaRPr>
                     </a:p>
                   </a:txBody>
-                  <a:tcPr marL="76200" marR="76200" marT="12700" marB="12700" anchor="ctr">
+                  <a:tcPr marL="76200" marR="76200" marT="39370" marB="0" anchor="ctr">
                     <a:lnL w="12700" cap="flat" cmpd="sng" algn="ctr">
                       <a:solidFill>
                         <a:srgbClr val="BFBFBF"/>
@@ -5595,7 +5595,7 @@
                   </a:tcPr>
                 </a:tc>
               </a:tr>
-              <a:tr h="640080">
+              <a:tr h="649224">
                 <a:tc>
                   <a:txBody>
                     <a:bodyPr/>
@@ -5649,7 +5649,7 @@
                       </a:endParaRPr>
                     </a:p>
                   </a:txBody>
-                  <a:tcPr marL="76200" marR="76200" marT="12700" marB="12700" anchor="ctr">
+                  <a:tcPr marL="76200" marR="76200" marT="39370" marB="0" anchor="ctr">
                     <a:lnL w="12700" cap="flat" cmpd="sng" algn="ctr">
                       <a:solidFill>
                         <a:srgbClr val="BFBFBF"/>
@@ -5741,7 +5741,7 @@
                       </a:endParaRPr>
                     </a:p>
                   </a:txBody>
-                  <a:tcPr marL="76200" marR="76200" marT="12700" marB="12700" anchor="ctr">
+                  <a:tcPr marL="76200" marR="76200" marT="39370" marB="0" anchor="ctr">
                     <a:lnL w="12700" cap="flat" cmpd="sng" algn="ctr">
                       <a:solidFill>
                         <a:srgbClr val="BFBFBF"/>
@@ -5809,7 +5809,7 @@
                       </a:endParaRPr>
                     </a:p>
                   </a:txBody>
-                  <a:tcPr marL="76200" marR="76200" marT="12700" marB="12700" anchor="ctr">
+                  <a:tcPr marL="76200" marR="76200" marT="39370" marB="0" anchor="ctr">
                     <a:lnL w="12700" cap="flat" cmpd="sng" algn="ctr">
                       <a:solidFill>
                         <a:srgbClr val="BFBFBF"/>
@@ -5849,7 +5849,7 @@
                   </a:tcPr>
                 </a:tc>
               </a:tr>
-              <a:tr h="640080">
+              <a:tr h="649224">
                 <a:tc>
                   <a:txBody>
                     <a:bodyPr/>
@@ -5879,7 +5879,7 @@
                       </a:endParaRPr>
                     </a:p>
                   </a:txBody>
-                  <a:tcPr marL="76200" marR="76200" marT="12700" marB="12700" anchor="ctr">
+                  <a:tcPr marL="76200" marR="76200" marT="39370" marB="0" anchor="ctr">
                     <a:lnL w="12700" cap="flat" cmpd="sng" algn="ctr">
                       <a:solidFill>
                         <a:srgbClr val="BFBFBF"/>
@@ -5971,7 +5971,7 @@
                       </a:endParaRPr>
                     </a:p>
                   </a:txBody>
-                  <a:tcPr marL="76200" marR="76200" marT="12700" marB="12700" anchor="ctr">
+                  <a:tcPr marL="76200" marR="76200" marT="39370" marB="0" anchor="ctr">
                     <a:lnL w="12700" cap="flat" cmpd="sng" algn="ctr">
                       <a:solidFill>
                         <a:srgbClr val="BFBFBF"/>
@@ -6063,7 +6063,7 @@
                       </a:endParaRPr>
                     </a:p>
                   </a:txBody>
-                  <a:tcPr marL="76200" marR="76200" marT="12700" marB="12700" anchor="ctr">
+                  <a:tcPr marL="76200" marR="76200" marT="39370" marB="0" anchor="ctr">
                     <a:lnL w="12700" cap="flat" cmpd="sng" algn="ctr">
                       <a:solidFill>
                         <a:srgbClr val="BFBFBF"/>
@@ -6464,7 +6464,7 @@
                 <a:ea typeface="メイリオ" pitchFamily="34" charset="-122"/>
                 <a:cs typeface="メイリオ" pitchFamily="34" charset="-120"/>
               </a:rPr>
-              <a:t>Teh SH, et al. Gastroenterology 2007;132:1261-1269/Northup PG, et al.</a:t>
+              <a:t>Teh et al. Gastroenterology 2007 / Northup et al. Clin Gastroenterol Hepatol 2019（AGA）</a:t>
             </a:r>
             <a:endParaRPr lang="ja-JP" sz="1600" dirty="0"/>
           </a:p>
@@ -6481,7 +6481,7 @@
                 <a:ea typeface="メイリオ" pitchFamily="34" charset="-122"/>
                 <a:cs typeface="メイリオ" pitchFamily="34" charset="-120"/>
               </a:rPr>
-              <a:t>Clin Gastroenterol Hepatol 2019;17:595-606/Mahmud N, et al. Hepatology 2021;73:204-218</a:t>
+              <a:t>Mahmud et al. Hepatology 2021（VOCAL-Penn）</a:t>
             </a:r>
             <a:endParaRPr lang="ja-JP" sz="1600" dirty="0"/>
           </a:p>
@@ -8732,7 +8732,7 @@
                 <a:ea typeface="メイリオ" pitchFamily="34" charset="-122"/>
                 <a:cs typeface="メイリオ" pitchFamily="34" charset="-120"/>
               </a:rPr>
-              <a:t>O'Leary JG, et al. Gastroenterology 2019;157:34-43（AGA） / Stöhr T, et al. Br J Anaesth</a:t>
+              <a:t>O'Leary et al. Gastroenterology 2019（AGA） / Stöhr et al. Br J Anaesth 2021</a:t>
             </a:r>
             <a:endParaRPr lang="ja-JP" sz="1600" dirty="0"/>
           </a:p>
@@ -8749,7 +8749,7 @@
                 <a:ea typeface="メイリオ" pitchFamily="34" charset="-122"/>
                 <a:cs typeface="メイリオ" pitchFamily="34" charset="-120"/>
               </a:rPr>
-              <a:t>2021;127:415-423 / Khalil M, et al. Anesthesiology 1994;80:1241-1247</a:t>
+              <a:t>Khalil et al. Anesthesiology 1994</a:t>
             </a:r>
             <a:endParaRPr lang="ja-JP" sz="1600" dirty="0"/>
           </a:p>
@@ -8763,12 +8763,12 @@
         </p:nvSpPr>
         <p:spPr>
           <a:xfrm>
-            <a:off x="502920" y="1691640"/>
-            <a:ext cx="5472684" cy="4197096"/>
+            <a:off x="502920" y="1664208"/>
+            <a:ext cx="5472684" cy="4251046"/>
           </a:xfrm>
           <a:prstGeom prst="roundRect">
             <a:avLst>
-              <a:gd name="adj" fmla="val 1743"/>
+              <a:gd name="adj" fmla="val 1721"/>
             </a:avLst>
           </a:prstGeom>
           <a:solidFill>
@@ -8785,7 +8785,7 @@
         </p:nvSpPr>
         <p:spPr>
           <a:xfrm>
-            <a:off x="594360" y="1783080"/>
+            <a:off x="594360" y="1755648"/>
             <a:ext cx="5289804" cy="420624"/>
           </a:xfrm>
           <a:prstGeom prst="rect">
@@ -8824,7 +8824,7 @@
         </p:nvSpPr>
         <p:spPr>
           <a:xfrm>
-            <a:off x="594360" y="2221992"/>
+            <a:off x="594360" y="2194560"/>
             <a:ext cx="329184" cy="374904"/>
           </a:xfrm>
           <a:prstGeom prst="rect">
@@ -8863,7 +8863,7 @@
         </p:nvSpPr>
         <p:spPr>
           <a:xfrm>
-            <a:off x="841248" y="2221992"/>
+            <a:off x="841248" y="2194560"/>
             <a:ext cx="5042916" cy="374904"/>
           </a:xfrm>
           <a:prstGeom prst="rect">
@@ -8902,7 +8902,7 @@
         </p:nvSpPr>
         <p:spPr>
           <a:xfrm>
-            <a:off x="841248" y="2557577"/>
+            <a:off x="841248" y="2530145"/>
             <a:ext cx="5042916" cy="374904"/>
           </a:xfrm>
           <a:prstGeom prst="rect">
@@ -8941,7 +8941,7 @@
         </p:nvSpPr>
         <p:spPr>
           <a:xfrm>
-            <a:off x="594360" y="2966314"/>
+            <a:off x="594360" y="2957170"/>
             <a:ext cx="329184" cy="374904"/>
           </a:xfrm>
           <a:prstGeom prst="rect">
@@ -8980,7 +8980,7 @@
         </p:nvSpPr>
         <p:spPr>
           <a:xfrm>
-            <a:off x="841248" y="2966314"/>
+            <a:off x="841248" y="2957170"/>
             <a:ext cx="5042916" cy="374904"/>
           </a:xfrm>
           <a:prstGeom prst="rect">
@@ -9019,7 +9019,7 @@
         </p:nvSpPr>
         <p:spPr>
           <a:xfrm>
-            <a:off x="841248" y="3301898"/>
+            <a:off x="841248" y="3292754"/>
             <a:ext cx="5042916" cy="374904"/>
           </a:xfrm>
           <a:prstGeom prst="rect">
@@ -9058,7 +9058,7 @@
         </p:nvSpPr>
         <p:spPr>
           <a:xfrm>
-            <a:off x="594360" y="3711550"/>
+            <a:off x="594360" y="3719779"/>
             <a:ext cx="329184" cy="374904"/>
           </a:xfrm>
           <a:prstGeom prst="rect">
@@ -9097,7 +9097,7 @@
         </p:nvSpPr>
         <p:spPr>
           <a:xfrm>
-            <a:off x="841248" y="3711550"/>
+            <a:off x="841248" y="3719779"/>
             <a:ext cx="5042916" cy="374904"/>
           </a:xfrm>
           <a:prstGeom prst="rect">
@@ -9136,7 +9136,7 @@
         </p:nvSpPr>
         <p:spPr>
           <a:xfrm>
-            <a:off x="841248" y="4047134"/>
+            <a:off x="841248" y="4055364"/>
             <a:ext cx="5042916" cy="374904"/>
           </a:xfrm>
           <a:prstGeom prst="rect">
@@ -9175,7 +9175,7 @@
         </p:nvSpPr>
         <p:spPr>
           <a:xfrm>
-            <a:off x="841248" y="4381805"/>
+            <a:off x="841248" y="4390949"/>
             <a:ext cx="5042916" cy="374904"/>
           </a:xfrm>
           <a:prstGeom prst="rect">
@@ -9214,7 +9214,7 @@
         </p:nvSpPr>
         <p:spPr>
           <a:xfrm>
-            <a:off x="841248" y="4717390"/>
+            <a:off x="841248" y="4725619"/>
             <a:ext cx="5042916" cy="374904"/>
           </a:xfrm>
           <a:prstGeom prst="rect">
@@ -9253,7 +9253,7 @@
         </p:nvSpPr>
         <p:spPr>
           <a:xfrm>
-            <a:off x="594360" y="5127041"/>
+            <a:off x="594360" y="5153558"/>
             <a:ext cx="329184" cy="374904"/>
           </a:xfrm>
           <a:prstGeom prst="rect">
@@ -9292,7 +9292,7 @@
         </p:nvSpPr>
         <p:spPr>
           <a:xfrm>
-            <a:off x="841248" y="5127041"/>
+            <a:off x="841248" y="5153558"/>
             <a:ext cx="5042916" cy="374904"/>
           </a:xfrm>
           <a:prstGeom prst="rect">
@@ -9331,7 +9331,7 @@
         </p:nvSpPr>
         <p:spPr>
           <a:xfrm>
-            <a:off x="841248" y="5461711"/>
+            <a:off x="841248" y="5488229"/>
             <a:ext cx="5042916" cy="374904"/>
           </a:xfrm>
           <a:prstGeom prst="rect">
@@ -9370,12 +9370,12 @@
         </p:nvSpPr>
         <p:spPr>
           <a:xfrm>
-            <a:off x="6213348" y="1691640"/>
-            <a:ext cx="5472684" cy="4197096"/>
+            <a:off x="6213348" y="1664208"/>
+            <a:ext cx="5472684" cy="4251046"/>
           </a:xfrm>
           <a:prstGeom prst="roundRect">
             <a:avLst>
-              <a:gd name="adj" fmla="val 1743"/>
+              <a:gd name="adj" fmla="val 1721"/>
             </a:avLst>
           </a:prstGeom>
           <a:solidFill>
@@ -9392,7 +9392,7 @@
         </p:nvSpPr>
         <p:spPr>
           <a:xfrm>
-            <a:off x="6304788" y="1783080"/>
+            <a:off x="6304788" y="1755648"/>
             <a:ext cx="5289804" cy="420624"/>
           </a:xfrm>
           <a:prstGeom prst="rect">
@@ -9431,7 +9431,7 @@
         </p:nvSpPr>
         <p:spPr>
           <a:xfrm>
-            <a:off x="6304788" y="2221992"/>
+            <a:off x="6304788" y="2194560"/>
             <a:ext cx="329184" cy="374904"/>
           </a:xfrm>
           <a:prstGeom prst="rect">
@@ -9470,7 +9470,7 @@
         </p:nvSpPr>
         <p:spPr>
           <a:xfrm>
-            <a:off x="6551676" y="2221992"/>
+            <a:off x="6551676" y="2194560"/>
             <a:ext cx="5042916" cy="374904"/>
           </a:xfrm>
           <a:prstGeom prst="rect">
@@ -9509,7 +9509,7 @@
         </p:nvSpPr>
         <p:spPr>
           <a:xfrm>
-            <a:off x="6551676" y="2557577"/>
+            <a:off x="6551676" y="2530145"/>
             <a:ext cx="5042916" cy="374904"/>
           </a:xfrm>
           <a:prstGeom prst="rect">
@@ -9548,7 +9548,7 @@
         </p:nvSpPr>
         <p:spPr>
           <a:xfrm>
-            <a:off x="6304788" y="2966314"/>
+            <a:off x="6304788" y="3018434"/>
             <a:ext cx="329184" cy="374904"/>
           </a:xfrm>
           <a:prstGeom prst="rect">
@@ -9587,7 +9587,7 @@
         </p:nvSpPr>
         <p:spPr>
           <a:xfrm>
-            <a:off x="6551676" y="2966314"/>
+            <a:off x="6551676" y="3018434"/>
             <a:ext cx="5042916" cy="374904"/>
           </a:xfrm>
           <a:prstGeom prst="rect">
@@ -9626,7 +9626,7 @@
         </p:nvSpPr>
         <p:spPr>
           <a:xfrm>
-            <a:off x="6551676" y="3301898"/>
+            <a:off x="6551676" y="3353105"/>
             <a:ext cx="5042916" cy="374904"/>
           </a:xfrm>
           <a:prstGeom prst="rect">
@@ -9665,7 +9665,7 @@
         </p:nvSpPr>
         <p:spPr>
           <a:xfrm>
-            <a:off x="6304788" y="3711550"/>
+            <a:off x="6304788" y="3841394"/>
             <a:ext cx="329184" cy="374904"/>
           </a:xfrm>
           <a:prstGeom prst="rect">
@@ -9704,7 +9704,7 @@
         </p:nvSpPr>
         <p:spPr>
           <a:xfrm>
-            <a:off x="6551676" y="3711550"/>
+            <a:off x="6551676" y="3841394"/>
             <a:ext cx="5042916" cy="374904"/>
           </a:xfrm>
           <a:prstGeom prst="rect">
@@ -9743,7 +9743,7 @@
         </p:nvSpPr>
         <p:spPr>
           <a:xfrm>
-            <a:off x="6551676" y="4047134"/>
+            <a:off x="6551676" y="4176979"/>
             <a:ext cx="5042916" cy="374904"/>
           </a:xfrm>
           <a:prstGeom prst="rect">
@@ -9782,7 +9782,7 @@
         </p:nvSpPr>
         <p:spPr>
           <a:xfrm>
-            <a:off x="6304788" y="4455871"/>
+            <a:off x="6304788" y="4665269"/>
             <a:ext cx="329184" cy="374904"/>
           </a:xfrm>
           <a:prstGeom prst="rect">
@@ -9821,7 +9821,7 @@
         </p:nvSpPr>
         <p:spPr>
           <a:xfrm>
-            <a:off x="6551676" y="4455871"/>
+            <a:off x="6551676" y="4665269"/>
             <a:ext cx="5042916" cy="374904"/>
           </a:xfrm>
           <a:prstGeom prst="rect">
@@ -9860,7 +9860,7 @@
         </p:nvSpPr>
         <p:spPr>
           <a:xfrm>
-            <a:off x="6551676" y="4791456"/>
+            <a:off x="6551676" y="4999939"/>
             <a:ext cx="5042916" cy="374904"/>
           </a:xfrm>
           <a:prstGeom prst="rect">
@@ -9899,7 +9899,7 @@
         </p:nvSpPr>
         <p:spPr>
           <a:xfrm>
-            <a:off x="6304788" y="5201107"/>
+            <a:off x="6304788" y="5488229"/>
             <a:ext cx="329184" cy="374904"/>
           </a:xfrm>
           <a:prstGeom prst="rect">
@@ -9938,7 +9938,7 @@
         </p:nvSpPr>
         <p:spPr>
           <a:xfrm>
-            <a:off x="6551676" y="5201107"/>
+            <a:off x="6551676" y="5488229"/>
             <a:ext cx="5042916" cy="374904"/>
           </a:xfrm>
           <a:prstGeom prst="rect">
@@ -10326,7 +10326,7 @@
                 <a:ea typeface="メイリオ" pitchFamily="34" charset="-122"/>
                 <a:cs typeface="メイリオ" pitchFamily="34" charset="-120"/>
               </a:rPr>
-              <a:t>Northup PG, et al. Clin Gastroenterol Hepatol 2019;17:595-606/Fielding-Singh V, et al.</a:t>
+              <a:t>Northup et al. Clin Gastroenterol Hepatol 2019（AGA）</a:t>
             </a:r>
             <a:endParaRPr lang="ja-JP" sz="1600" dirty="0"/>
           </a:p>
@@ -10343,7 +10343,7 @@
                 <a:ea typeface="メイリオ" pitchFamily="34" charset="-122"/>
                 <a:cs typeface="メイリオ" pitchFamily="34" charset="-120"/>
               </a:rPr>
-              <a:t>Anesthesiology 2025;143:1030-1048/Neeff H, et al. J Gastrointest Surg 2011;15:1-11</a:t>
+              <a:t>Fielding-Singh et al. Anesthesiology 2025 / Neeff et al. J Gastrointest Surg 2011</a:t>
             </a:r>
             <a:endParaRPr lang="ja-JP" sz="1600" dirty="0"/>
           </a:p>
@@ -11808,8 +11808,8 @@
         </p:nvSpPr>
         <p:spPr>
           <a:xfrm>
-            <a:off x="502920" y="1691640"/>
-            <a:ext cx="11155680" cy="4197096"/>
+            <a:off x="502920" y="1988820"/>
+            <a:ext cx="355702" cy="457200"/>
           </a:xfrm>
           <a:prstGeom prst="rect">
             <a:avLst/>
@@ -11818,15 +11818,11 @@
           <a:ln/>
         </p:spPr>
         <p:txBody>
-          <a:bodyPr wrap="square" lIns="0" tIns="0" rIns="0" bIns="0" rtlCol="0" anchor="ctr"/>
-          <a:lstStyle/>
-          <a:p>
-            <a:pPr algn="l" marL="355600" indent="-355600">
-              <a:spcAft>
-                <a:spcPts val="2600"/>
-              </a:spcAft>
-              <a:buSzPct val="100000"/>
-              <a:buChar char="•"/>
+          <a:bodyPr wrap="square" lIns="0" tIns="0" rIns="0" bIns="0" rtlCol="0" anchor="t"/>
+          <a:lstStyle/>
+          <a:p>
+            <a:pPr algn="l" indent="0" marL="0">
+              <a:buNone/>
             </a:pPr>
             <a:r>
               <a:rPr lang="ja-JP" altLang="en-US" sz="2400" dirty="0">
@@ -11837,6 +11833,45 @@
                 <a:ea typeface="メイリオ" pitchFamily="34" charset="-122"/>
                 <a:cs typeface="メイリオ" pitchFamily="34" charset="-120"/>
               </a:rPr>
+              <a:t>•</a:t>
+            </a:r>
+            <a:endParaRPr lang="ja-JP" sz="2400" dirty="0"/>
+          </a:p>
+        </p:txBody>
+      </p:sp>
+      <p:sp>
+        <p:nvSpPr>
+          <p:cNvPr id="11" name="Text 9"/>
+          <p:cNvSpPr txBox="1"/>
+          <p:nvPr/>
+        </p:nvSpPr>
+        <p:spPr>
+          <a:xfrm>
+            <a:off x="858622" y="1988820"/>
+            <a:ext cx="10799978" cy="457200"/>
+          </a:xfrm>
+          <a:prstGeom prst="rect">
+            <a:avLst/>
+          </a:prstGeom>
+          <a:noFill/>
+          <a:ln/>
+        </p:spPr>
+        <p:txBody>
+          <a:bodyPr wrap="square" lIns="0" tIns="0" rIns="0" bIns="0" rtlCol="0" anchor="t"/>
+          <a:lstStyle/>
+          <a:p>
+            <a:pPr algn="l" indent="0" marL="0">
+              <a:buNone/>
+            </a:pPr>
+            <a:r>
+              <a:rPr lang="ja-JP" altLang="en-US" sz="2400" dirty="0">
+                <a:solidFill>
+                  <a:srgbClr val="262626"/>
+                </a:solidFill>
+                <a:latin typeface="メイリオ" pitchFamily="34" charset="0"/>
+                <a:ea typeface="メイリオ" pitchFamily="34" charset="-122"/>
+                <a:cs typeface="メイリオ" pitchFamily="34" charset="-120"/>
+              </a:rPr>
               <a:t>透析は</a:t>
             </a:r>
             <a:r>
@@ -11863,13 +11898,70 @@
             </a:r>
             <a:endParaRPr lang="ja-JP" sz="2400" dirty="0"/>
           </a:p>
-          <a:p>
-            <a:pPr algn="l" marL="355600" indent="-355600">
-              <a:spcAft>
-                <a:spcPts val="2600"/>
-              </a:spcAft>
-              <a:buSzPct val="100000"/>
-              <a:buChar char="•"/>
+        </p:txBody>
+      </p:sp>
+      <p:sp>
+        <p:nvSpPr>
+          <p:cNvPr id="12" name="Text 10"/>
+          <p:cNvSpPr txBox="1"/>
+          <p:nvPr/>
+        </p:nvSpPr>
+        <p:spPr>
+          <a:xfrm>
+            <a:off x="502920" y="2775204"/>
+            <a:ext cx="355702" cy="457200"/>
+          </a:xfrm>
+          <a:prstGeom prst="rect">
+            <a:avLst/>
+          </a:prstGeom>
+          <a:noFill/>
+          <a:ln/>
+        </p:spPr>
+        <p:txBody>
+          <a:bodyPr wrap="square" lIns="0" tIns="0" rIns="0" bIns="0" rtlCol="0" anchor="t"/>
+          <a:lstStyle/>
+          <a:p>
+            <a:pPr algn="l" indent="0" marL="0">
+              <a:buNone/>
+            </a:pPr>
+            <a:r>
+              <a:rPr lang="ja-JP" altLang="en-US" sz="2400" dirty="0">
+                <a:solidFill>
+                  <a:srgbClr val="262626"/>
+                </a:solidFill>
+                <a:latin typeface="メイリオ" pitchFamily="34" charset="0"/>
+                <a:ea typeface="メイリオ" pitchFamily="34" charset="-122"/>
+                <a:cs typeface="メイリオ" pitchFamily="34" charset="-120"/>
+              </a:rPr>
+              <a:t>•</a:t>
+            </a:r>
+            <a:endParaRPr lang="ja-JP" sz="2400" dirty="0"/>
+          </a:p>
+        </p:txBody>
+      </p:sp>
+      <p:sp>
+        <p:nvSpPr>
+          <p:cNvPr id="13" name="Text 11"/>
+          <p:cNvSpPr txBox="1"/>
+          <p:nvPr/>
+        </p:nvSpPr>
+        <p:spPr>
+          <a:xfrm>
+            <a:off x="858622" y="2775204"/>
+            <a:ext cx="10799978" cy="457200"/>
+          </a:xfrm>
+          <a:prstGeom prst="rect">
+            <a:avLst/>
+          </a:prstGeom>
+          <a:noFill/>
+          <a:ln/>
+        </p:spPr>
+        <p:txBody>
+          <a:bodyPr wrap="square" lIns="0" tIns="0" rIns="0" bIns="0" rtlCol="0" anchor="t"/>
+          <a:lstStyle/>
+          <a:p>
+            <a:pPr algn="l" indent="0" marL="0">
+              <a:buNone/>
             </a:pPr>
             <a:r>
               <a:rPr lang="ja-JP" altLang="en-US" sz="2400" b="1" dirty="0">
@@ -11895,13 +11987,70 @@
             </a:r>
             <a:endParaRPr lang="ja-JP" sz="2400" dirty="0"/>
           </a:p>
-          <a:p>
-            <a:pPr algn="l" marL="355600" indent="-355600">
-              <a:spcAft>
-                <a:spcPts val="2600"/>
-              </a:spcAft>
-              <a:buSzPct val="100000"/>
-              <a:buChar char="•"/>
+        </p:txBody>
+      </p:sp>
+      <p:sp>
+        <p:nvSpPr>
+          <p:cNvPr id="14" name="Text 12"/>
+          <p:cNvSpPr txBox="1"/>
+          <p:nvPr/>
+        </p:nvSpPr>
+        <p:spPr>
+          <a:xfrm>
+            <a:off x="502920" y="3561588"/>
+            <a:ext cx="355702" cy="457200"/>
+          </a:xfrm>
+          <a:prstGeom prst="rect">
+            <a:avLst/>
+          </a:prstGeom>
+          <a:noFill/>
+          <a:ln/>
+        </p:spPr>
+        <p:txBody>
+          <a:bodyPr wrap="square" lIns="0" tIns="0" rIns="0" bIns="0" rtlCol="0" anchor="t"/>
+          <a:lstStyle/>
+          <a:p>
+            <a:pPr algn="l" indent="0" marL="0">
+              <a:buNone/>
+            </a:pPr>
+            <a:r>
+              <a:rPr lang="ja-JP" altLang="en-US" sz="2400" dirty="0">
+                <a:solidFill>
+                  <a:srgbClr val="262626"/>
+                </a:solidFill>
+                <a:latin typeface="メイリオ" pitchFamily="34" charset="0"/>
+                <a:ea typeface="メイリオ" pitchFamily="34" charset="-122"/>
+                <a:cs typeface="メイリオ" pitchFamily="34" charset="-120"/>
+              </a:rPr>
+              <a:t>•</a:t>
+            </a:r>
+            <a:endParaRPr lang="ja-JP" sz="2400" dirty="0"/>
+          </a:p>
+        </p:txBody>
+      </p:sp>
+      <p:sp>
+        <p:nvSpPr>
+          <p:cNvPr id="15" name="Text 13"/>
+          <p:cNvSpPr txBox="1"/>
+          <p:nvPr/>
+        </p:nvSpPr>
+        <p:spPr>
+          <a:xfrm>
+            <a:off x="858622" y="3561588"/>
+            <a:ext cx="10799978" cy="457200"/>
+          </a:xfrm>
+          <a:prstGeom prst="rect">
+            <a:avLst/>
+          </a:prstGeom>
+          <a:noFill/>
+          <a:ln/>
+        </p:spPr>
+        <p:txBody>
+          <a:bodyPr wrap="square" lIns="0" tIns="0" rIns="0" bIns="0" rtlCol="0" anchor="t"/>
+          <a:lstStyle/>
+          <a:p>
+            <a:pPr algn="l" indent="0" marL="0">
+              <a:buNone/>
             </a:pPr>
             <a:r>
               <a:rPr lang="ja-JP" altLang="en-US" sz="2400" b="1" dirty="0">
@@ -11927,13 +12076,31 @@
             </a:r>
             <a:endParaRPr lang="ja-JP" sz="2400" dirty="0"/>
           </a:p>
-          <a:p>
-            <a:pPr algn="l" marL="355600" indent="-355600">
-              <a:spcAft>
-                <a:spcPts val="2600"/>
-              </a:spcAft>
-              <a:buSzPct val="100000"/>
-              <a:buChar char="•"/>
+        </p:txBody>
+      </p:sp>
+      <p:sp>
+        <p:nvSpPr>
+          <p:cNvPr id="16" name="Text 14"/>
+          <p:cNvSpPr txBox="1"/>
+          <p:nvPr/>
+        </p:nvSpPr>
+        <p:spPr>
+          <a:xfrm>
+            <a:off x="502920" y="4347972"/>
+            <a:ext cx="355702" cy="457200"/>
+          </a:xfrm>
+          <a:prstGeom prst="rect">
+            <a:avLst/>
+          </a:prstGeom>
+          <a:noFill/>
+          <a:ln/>
+        </p:spPr>
+        <p:txBody>
+          <a:bodyPr wrap="square" lIns="0" tIns="0" rIns="0" bIns="0" rtlCol="0" anchor="t"/>
+          <a:lstStyle/>
+          <a:p>
+            <a:pPr algn="l" indent="0" marL="0">
+              <a:buNone/>
             </a:pPr>
             <a:r>
               <a:rPr lang="ja-JP" altLang="en-US" sz="2400" dirty="0">
@@ -11944,6 +12111,45 @@
                 <a:ea typeface="メイリオ" pitchFamily="34" charset="-122"/>
                 <a:cs typeface="メイリオ" pitchFamily="34" charset="-120"/>
               </a:rPr>
+              <a:t>•</a:t>
+            </a:r>
+            <a:endParaRPr lang="ja-JP" sz="2400" dirty="0"/>
+          </a:p>
+        </p:txBody>
+      </p:sp>
+      <p:sp>
+        <p:nvSpPr>
+          <p:cNvPr id="17" name="Text 15"/>
+          <p:cNvSpPr txBox="1"/>
+          <p:nvPr/>
+        </p:nvSpPr>
+        <p:spPr>
+          <a:xfrm>
+            <a:off x="858622" y="4347972"/>
+            <a:ext cx="10799978" cy="457200"/>
+          </a:xfrm>
+          <a:prstGeom prst="rect">
+            <a:avLst/>
+          </a:prstGeom>
+          <a:noFill/>
+          <a:ln/>
+        </p:spPr>
+        <p:txBody>
+          <a:bodyPr wrap="square" lIns="0" tIns="0" rIns="0" bIns="0" rtlCol="0" anchor="t"/>
+          <a:lstStyle/>
+          <a:p>
+            <a:pPr algn="l" indent="0" marL="0">
+              <a:buNone/>
+            </a:pPr>
+            <a:r>
+              <a:rPr lang="ja-JP" altLang="en-US" sz="2400" dirty="0">
+                <a:solidFill>
+                  <a:srgbClr val="262626"/>
+                </a:solidFill>
+                <a:latin typeface="メイリオ" pitchFamily="34" charset="0"/>
+                <a:ea typeface="メイリオ" pitchFamily="34" charset="-122"/>
+                <a:cs typeface="メイリオ" pitchFamily="34" charset="-120"/>
+              </a:rPr>
               <a:t>造影剤は </a:t>
             </a:r>
             <a:r>
@@ -11970,13 +12176,70 @@
             </a:r>
             <a:endParaRPr lang="ja-JP" sz="2400" dirty="0"/>
           </a:p>
-          <a:p>
-            <a:pPr algn="l" marL="355600" indent="-355600">
-              <a:spcAft>
-                <a:spcPts val="2600"/>
-              </a:spcAft>
-              <a:buSzPct val="100000"/>
-              <a:buChar char="•"/>
+        </p:txBody>
+      </p:sp>
+      <p:sp>
+        <p:nvSpPr>
+          <p:cNvPr id="18" name="Text 16"/>
+          <p:cNvSpPr txBox="1"/>
+          <p:nvPr/>
+        </p:nvSpPr>
+        <p:spPr>
+          <a:xfrm>
+            <a:off x="502920" y="5134356"/>
+            <a:ext cx="355702" cy="457200"/>
+          </a:xfrm>
+          <a:prstGeom prst="rect">
+            <a:avLst/>
+          </a:prstGeom>
+          <a:noFill/>
+          <a:ln/>
+        </p:spPr>
+        <p:txBody>
+          <a:bodyPr wrap="square" lIns="0" tIns="0" rIns="0" bIns="0" rtlCol="0" anchor="t"/>
+          <a:lstStyle/>
+          <a:p>
+            <a:pPr algn="l" indent="0" marL="0">
+              <a:buNone/>
+            </a:pPr>
+            <a:r>
+              <a:rPr lang="ja-JP" altLang="en-US" sz="2400" dirty="0">
+                <a:solidFill>
+                  <a:srgbClr val="262626"/>
+                </a:solidFill>
+                <a:latin typeface="メイリオ" pitchFamily="34" charset="0"/>
+                <a:ea typeface="メイリオ" pitchFamily="34" charset="-122"/>
+                <a:cs typeface="メイリオ" pitchFamily="34" charset="-120"/>
+              </a:rPr>
+              <a:t>•</a:t>
+            </a:r>
+            <a:endParaRPr lang="ja-JP" sz="2400" dirty="0"/>
+          </a:p>
+        </p:txBody>
+      </p:sp>
+      <p:sp>
+        <p:nvSpPr>
+          <p:cNvPr id="19" name="Text 17"/>
+          <p:cNvSpPr txBox="1"/>
+          <p:nvPr/>
+        </p:nvSpPr>
+        <p:spPr>
+          <a:xfrm>
+            <a:off x="858622" y="5134356"/>
+            <a:ext cx="10799978" cy="457200"/>
+          </a:xfrm>
+          <a:prstGeom prst="rect">
+            <a:avLst/>
+          </a:prstGeom>
+          <a:noFill/>
+          <a:ln/>
+        </p:spPr>
+        <p:txBody>
+          <a:bodyPr wrap="square" lIns="0" tIns="0" rIns="0" bIns="0" rtlCol="0" anchor="t"/>
+          <a:lstStyle/>
+          <a:p>
+            <a:pPr algn="l" indent="0" marL="0">
+              <a:buNone/>
             </a:pPr>
             <a:r>
               <a:rPr lang="ja-JP" altLang="en-US" sz="2400" b="1" dirty="0">
